--- a/발표 자료/개인별 ppt/박세인_PPT.pptx
+++ b/발표 자료/개인별 ppt/박세인_PPT.pptx
@@ -106,6 +106,11 @@
       </a:defRPr>
     </a:lvl9pPr>
   </p:defaultTextStyle>
+  <p:extLst>
+    <p:ext uri="{EFAFB233-063F-42B5-8137-9DF3F51BA10A}">
+      <p15:sldGuideLst xmlns:p15="http://schemas.microsoft.com/office/powerpoint/2012/main"/>
+    </p:ext>
+  </p:extLst>
 </p:presentation>
 </file>
 
@@ -4748,7 +4753,7 @@
         </p:nvSpPr>
         <p:spPr>
           <a:xfrm>
-            <a:off x="5372468" y="4949457"/>
+            <a:off x="5376494" y="4949457"/>
             <a:ext cx="2295249" cy="261610"/>
           </a:xfrm>
           <a:prstGeom prst="rect">
@@ -5116,7 +5121,7 @@
         </p:nvSpPr>
         <p:spPr>
           <a:xfrm>
-            <a:off x="7247320" y="5271580"/>
+            <a:off x="7339456" y="5271580"/>
             <a:ext cx="2598150" cy="938719"/>
           </a:xfrm>
           <a:prstGeom prst="rect">
@@ -5250,6 +5255,139 @@
             <a:r>
               <a:rPr lang="ko-KR" altLang="en-US" sz="1100" dirty="0"/>
               <a:t>클래스를 재설정해 가운데 카드 보이게 함</a:t>
+            </a:r>
+          </a:p>
+        </p:txBody>
+      </p:sp>
+      <p:sp>
+        <p:nvSpPr>
+          <p:cNvPr id="3" name="TextBox 2">
+            <a:extLst>
+              <a:ext uri="{FF2B5EF4-FFF2-40B4-BE49-F238E27FC236}">
+                <a16:creationId xmlns:a16="http://schemas.microsoft.com/office/drawing/2014/main" id="{0C0E7683-A902-9343-29E4-ED3B5FF15B58}"/>
+              </a:ext>
+            </a:extLst>
+          </p:cNvPr>
+          <p:cNvSpPr txBox="1"/>
+          <p:nvPr/>
+        </p:nvSpPr>
+        <p:spPr>
+          <a:xfrm>
+            <a:off x="5678316" y="4642201"/>
+            <a:ext cx="1733167" cy="276999"/>
+          </a:xfrm>
+          <a:prstGeom prst="rect">
+            <a:avLst/>
+          </a:prstGeom>
+          <a:noFill/>
+        </p:spPr>
+        <p:txBody>
+          <a:bodyPr wrap="none" rtlCol="0">
+            <a:spAutoFit/>
+          </a:bodyPr>
+          <a:lstStyle/>
+          <a:p>
+            <a:r>
+              <a:rPr lang="ko-KR" altLang="en-US" sz="1200" dirty="0">
+                <a:highlight>
+                  <a:srgbClr val="FFFF00"/>
+                </a:highlight>
+              </a:rPr>
+              <a:t>앞뒤에 복제 카드 추가</a:t>
+            </a:r>
+          </a:p>
+        </p:txBody>
+      </p:sp>
+      <p:sp>
+        <p:nvSpPr>
+          <p:cNvPr id="4" name="TextBox 3">
+            <a:extLst>
+              <a:ext uri="{FF2B5EF4-FFF2-40B4-BE49-F238E27FC236}">
+                <a16:creationId xmlns:a16="http://schemas.microsoft.com/office/drawing/2014/main" id="{C131FAD4-EABF-1ECB-0929-E970412432A3}"/>
+              </a:ext>
+            </a:extLst>
+          </p:cNvPr>
+          <p:cNvSpPr txBox="1"/>
+          <p:nvPr/>
+        </p:nvSpPr>
+        <p:spPr>
+          <a:xfrm>
+            <a:off x="7849326" y="4642201"/>
+            <a:ext cx="1832553" cy="276999"/>
+          </a:xfrm>
+          <a:prstGeom prst="rect">
+            <a:avLst/>
+          </a:prstGeom>
+          <a:noFill/>
+        </p:spPr>
+        <p:txBody>
+          <a:bodyPr wrap="none" rtlCol="0">
+            <a:spAutoFit/>
+          </a:bodyPr>
+          <a:lstStyle/>
+          <a:p>
+            <a:r>
+              <a:rPr lang="ko-KR" altLang="en-US" sz="1200" dirty="0">
+                <a:highlight>
+                  <a:srgbClr val="FFFF00"/>
+                </a:highlight>
+              </a:rPr>
+              <a:t>끝에 도달하면 순간이동</a:t>
+            </a:r>
+          </a:p>
+        </p:txBody>
+      </p:sp>
+      <p:sp>
+        <p:nvSpPr>
+          <p:cNvPr id="5" name="TextBox 4">
+            <a:extLst>
+              <a:ext uri="{FF2B5EF4-FFF2-40B4-BE49-F238E27FC236}">
+                <a16:creationId xmlns:a16="http://schemas.microsoft.com/office/drawing/2014/main" id="{23160BF8-1554-A3A1-DA9E-1699895B330F}"/>
+              </a:ext>
+            </a:extLst>
+          </p:cNvPr>
+          <p:cNvSpPr txBox="1"/>
+          <p:nvPr/>
+        </p:nvSpPr>
+        <p:spPr>
+          <a:xfrm>
+            <a:off x="10587273" y="4642201"/>
+            <a:ext cx="888385" cy="276999"/>
+          </a:xfrm>
+          <a:prstGeom prst="rect">
+            <a:avLst/>
+          </a:prstGeom>
+          <a:noFill/>
+        </p:spPr>
+        <p:txBody>
+          <a:bodyPr wrap="none" rtlCol="0">
+            <a:spAutoFit/>
+          </a:bodyPr>
+          <a:lstStyle/>
+          <a:p>
+            <a:r>
+              <a:rPr lang="ko-KR" altLang="en-US" sz="1200" dirty="0">
+                <a:highlight>
+                  <a:srgbClr val="FFFF00"/>
+                </a:highlight>
+              </a:rPr>
+              <a:t>좌</a:t>
+            </a:r>
+            <a:r>
+              <a:rPr lang="en-US" altLang="ko-KR" sz="1200" dirty="0">
+                <a:highlight>
+                  <a:srgbClr val="FFFF00"/>
+                </a:highlight>
+              </a:rPr>
+              <a:t>,</a:t>
+            </a:r>
+            <a:r>
+              <a:rPr lang="ko-KR" altLang="en-US" sz="1200" dirty="0">
+                <a:highlight>
+                  <a:srgbClr val="FFFF00"/>
+                </a:highlight>
+              </a:rPr>
+              <a:t>우 버튼</a:t>
             </a:r>
           </a:p>
         </p:txBody>

--- a/발표 자료/개인별 ppt/박세인_PPT.pptx
+++ b/발표 자료/개인별 ppt/박세인_PPT.pptx
@@ -4386,6 +4386,100 @@
           </p:txBody>
         </p:sp>
       </p:grpSp>
+      <p:cxnSp>
+        <p:nvCxnSpPr>
+          <p:cNvPr id="4" name="직선 화살표 연결선 3">
+            <a:extLst>
+              <a:ext uri="{FF2B5EF4-FFF2-40B4-BE49-F238E27FC236}">
+                <a16:creationId xmlns:a16="http://schemas.microsoft.com/office/drawing/2014/main" id="{2C41892B-0B0D-C970-F8B4-7CC3A9AC4471}"/>
+              </a:ext>
+            </a:extLst>
+          </p:cNvPr>
+          <p:cNvCxnSpPr/>
+          <p:nvPr/>
+        </p:nvCxnSpPr>
+        <p:spPr>
+          <a:xfrm>
+            <a:off x="1126947" y="4440025"/>
+            <a:ext cx="305927" cy="1622504"/>
+          </a:xfrm>
+          <a:prstGeom prst="straightConnector1">
+            <a:avLst/>
+          </a:prstGeom>
+          <a:ln>
+            <a:tailEnd type="triangle"/>
+          </a:ln>
+        </p:spPr>
+        <p:style>
+          <a:lnRef idx="2">
+            <a:schemeClr val="accent1"/>
+          </a:lnRef>
+          <a:fillRef idx="0">
+            <a:schemeClr val="accent1"/>
+          </a:fillRef>
+          <a:effectRef idx="1">
+            <a:schemeClr val="accent1"/>
+          </a:effectRef>
+          <a:fontRef idx="minor">
+            <a:schemeClr val="tx1"/>
+          </a:fontRef>
+        </p:style>
+      </p:cxnSp>
+      <p:sp>
+        <p:nvSpPr>
+          <p:cNvPr id="5" name="TextBox 4">
+            <a:extLst>
+              <a:ext uri="{FF2B5EF4-FFF2-40B4-BE49-F238E27FC236}">
+                <a16:creationId xmlns:a16="http://schemas.microsoft.com/office/drawing/2014/main" id="{CACA52DB-EFD6-88A6-E4E1-0BA71EFEFF55}"/>
+              </a:ext>
+            </a:extLst>
+          </p:cNvPr>
+          <p:cNvSpPr txBox="1"/>
+          <p:nvPr/>
+        </p:nvSpPr>
+        <p:spPr>
+          <a:xfrm>
+            <a:off x="905559" y="6098103"/>
+            <a:ext cx="2152676" cy="261610"/>
+          </a:xfrm>
+          <a:prstGeom prst="rect">
+            <a:avLst/>
+          </a:prstGeom>
+          <a:noFill/>
+        </p:spPr>
+        <p:txBody>
+          <a:bodyPr wrap="square" rtlCol="0">
+            <a:spAutoFit/>
+          </a:bodyPr>
+          <a:lstStyle/>
+          <a:p>
+            <a:r>
+              <a:rPr lang="ko-KR" altLang="en-US" sz="1100" b="1" dirty="0">
+                <a:highlight>
+                  <a:srgbClr val="FFFF00"/>
+                </a:highlight>
+              </a:rPr>
+              <a:t>클릭 시 </a:t>
+            </a:r>
+            <a:r>
+              <a:rPr lang="en-US" altLang="ko-KR" sz="1100" b="1" dirty="0">
+                <a:highlight>
+                  <a:srgbClr val="FFFF00"/>
+                </a:highlight>
+              </a:rPr>
+              <a:t>product.html</a:t>
+            </a:r>
+            <a:r>
+              <a:rPr lang="ko-KR" altLang="en-US" sz="1100" b="1" dirty="0">
+                <a:highlight>
+                  <a:srgbClr val="FFFF00"/>
+                </a:highlight>
+              </a:rPr>
+              <a:t>로 이동</a:t>
+            </a:r>
+          </a:p>
+        </p:txBody>
+      </p:sp>
     </p:spTree>
     <p:extLst>
       <p:ext uri="{BB962C8B-B14F-4D97-AF65-F5344CB8AC3E}">
@@ -5468,12 +5562,136 @@
           </a:p>
         </p:txBody>
       </p:sp>
+      <p:grpSp>
+        <p:nvGrpSpPr>
+          <p:cNvPr id="8" name="그룹 7">
+            <a:extLst>
+              <a:ext uri="{FF2B5EF4-FFF2-40B4-BE49-F238E27FC236}">
+                <a16:creationId xmlns:a16="http://schemas.microsoft.com/office/drawing/2014/main" id="{078388F0-2014-7A14-175E-AEE3ACA60577}"/>
+              </a:ext>
+            </a:extLst>
+          </p:cNvPr>
+          <p:cNvGrpSpPr/>
+          <p:nvPr/>
+        </p:nvGrpSpPr>
+        <p:grpSpPr>
+          <a:xfrm>
+            <a:off x="360973" y="1105022"/>
+            <a:ext cx="4606953" cy="3297296"/>
+            <a:chOff x="0" y="1315620"/>
+            <a:chExt cx="6096000" cy="3348793"/>
+          </a:xfrm>
+        </p:grpSpPr>
+        <p:pic>
+          <p:nvPicPr>
+            <p:cNvPr id="5" name="그림 4" descr="스크린샷, 텍스트, 디자인이(가) 표시된 사진&#10;&#10;AI 생성 콘텐츠는 정확하지 않을 수 있습니다.">
+              <a:extLst>
+                <a:ext uri="{FF2B5EF4-FFF2-40B4-BE49-F238E27FC236}">
+                  <a16:creationId xmlns:a16="http://schemas.microsoft.com/office/drawing/2014/main" id="{115D30D4-19BC-F62E-443E-E9736A5AF731}"/>
+                </a:ext>
+              </a:extLst>
+            </p:cNvPr>
+            <p:cNvPicPr>
+              <a:picLocks noChangeAspect="1"/>
+            </p:cNvPicPr>
+            <p:nvPr/>
+          </p:nvPicPr>
+          <p:blipFill>
+            <a:blip r:embed="rId2"/>
+            <a:stretch>
+              <a:fillRect/>
+            </a:stretch>
+          </p:blipFill>
+          <p:spPr>
+            <a:xfrm>
+              <a:off x="0" y="1315620"/>
+              <a:ext cx="6096000" cy="2375482"/>
+            </a:xfrm>
+            <a:prstGeom prst="rect">
+              <a:avLst/>
+            </a:prstGeom>
+          </p:spPr>
+        </p:pic>
+        <p:pic>
+          <p:nvPicPr>
+            <p:cNvPr id="7" name="그림 6" descr="텍스트, 폰트, 스크린샷이(가) 표시된 사진&#10;&#10;AI 생성 콘텐츠는 정확하지 않을 수 있습니다.">
+              <a:extLst>
+                <a:ext uri="{FF2B5EF4-FFF2-40B4-BE49-F238E27FC236}">
+                  <a16:creationId xmlns:a16="http://schemas.microsoft.com/office/drawing/2014/main" id="{E71CAC99-9A7B-E5A1-8972-C492BAFCFE92}"/>
+                </a:ext>
+              </a:extLst>
+            </p:cNvPr>
+            <p:cNvPicPr>
+              <a:picLocks noChangeAspect="1"/>
+            </p:cNvPicPr>
+            <p:nvPr/>
+          </p:nvPicPr>
+          <p:blipFill>
+            <a:blip r:embed="rId3"/>
+            <a:stretch>
+              <a:fillRect/>
+            </a:stretch>
+          </p:blipFill>
+          <p:spPr>
+            <a:xfrm>
+              <a:off x="0" y="3691102"/>
+              <a:ext cx="6096000" cy="973311"/>
+            </a:xfrm>
+            <a:prstGeom prst="rect">
+              <a:avLst/>
+            </a:prstGeom>
+          </p:spPr>
+        </p:pic>
+      </p:grpSp>
+      <p:cxnSp>
+        <p:nvCxnSpPr>
+          <p:cNvPr id="10" name="연결선: 꺾임 9">
+            <a:extLst>
+              <a:ext uri="{FF2B5EF4-FFF2-40B4-BE49-F238E27FC236}">
+                <a16:creationId xmlns:a16="http://schemas.microsoft.com/office/drawing/2014/main" id="{6002856E-2BF7-72AB-A31C-3683F34462F3}"/>
+              </a:ext>
+            </a:extLst>
+          </p:cNvPr>
+          <p:cNvCxnSpPr>
+            <a:cxnSpLocks/>
+          </p:cNvCxnSpPr>
+          <p:nvPr/>
+        </p:nvCxnSpPr>
+        <p:spPr>
+          <a:xfrm flipV="1">
+            <a:off x="1045558" y="2381855"/>
+            <a:ext cx="4440842" cy="743383"/>
+          </a:xfrm>
+          <a:prstGeom prst="bentConnector3">
+            <a:avLst>
+              <a:gd name="adj1" fmla="val 50000"/>
+            </a:avLst>
+          </a:prstGeom>
+          <a:ln>
+            <a:tailEnd type="triangle"/>
+          </a:ln>
+        </p:spPr>
+        <p:style>
+          <a:lnRef idx="2">
+            <a:schemeClr val="accent5"/>
+          </a:lnRef>
+          <a:fillRef idx="0">
+            <a:schemeClr val="accent5"/>
+          </a:fillRef>
+          <a:effectRef idx="1">
+            <a:schemeClr val="accent5"/>
+          </a:effectRef>
+          <a:fontRef idx="minor">
+            <a:schemeClr val="tx1"/>
+          </a:fontRef>
+        </p:style>
+      </p:cxnSp>
       <p:pic>
         <p:nvPicPr>
-          <p:cNvPr id="4" name="그림 3" descr="텍스트, 스크린샷, 소프트웨어, 웹사이트이(가) 표시된 사진&#10;&#10;AI 생성 콘텐츠는 정확하지 않을 수 있습니다.">
-            <a:extLst>
-              <a:ext uri="{FF2B5EF4-FFF2-40B4-BE49-F238E27FC236}">
-                <a16:creationId xmlns:a16="http://schemas.microsoft.com/office/drawing/2014/main" id="{B74C6CDC-859F-0985-9C72-630E2DD2152D}"/>
+          <p:cNvPr id="17" name="그림 16" descr="텍스트, 스크린샷, 폰트이(가) 표시된 사진&#10;&#10;AI 생성 콘텐츠는 정확하지 않을 수 있습니다.">
+            <a:extLst>
+              <a:ext uri="{FF2B5EF4-FFF2-40B4-BE49-F238E27FC236}">
+                <a16:creationId xmlns:a16="http://schemas.microsoft.com/office/drawing/2014/main" id="{9A12A589-D760-DADA-D0A4-9367AA9E7A58}"/>
               </a:ext>
             </a:extLst>
           </p:cNvPr>
@@ -5483,21 +5701,434 @@
           <p:nvPr/>
         </p:nvPicPr>
         <p:blipFill>
-          <a:blip r:embed="rId2"/>
+          <a:blip r:embed="rId4"/>
           <a:stretch>
             <a:fillRect/>
           </a:stretch>
         </p:blipFill>
         <p:spPr>
           <a:xfrm>
-            <a:off x="2414284" y="1035775"/>
-            <a:ext cx="7363431" cy="5506426"/>
+            <a:off x="5811558" y="999947"/>
+            <a:ext cx="6019469" cy="2763815"/>
           </a:xfrm>
           <a:prstGeom prst="rect">
             <a:avLst/>
           </a:prstGeom>
         </p:spPr>
       </p:pic>
+      <p:sp>
+        <p:nvSpPr>
+          <p:cNvPr id="15" name="TextBox 14">
+            <a:extLst>
+              <a:ext uri="{FF2B5EF4-FFF2-40B4-BE49-F238E27FC236}">
+                <a16:creationId xmlns:a16="http://schemas.microsoft.com/office/drawing/2014/main" id="{2210F02D-2FBB-5C76-24E5-F726418D681F}"/>
+              </a:ext>
+            </a:extLst>
+          </p:cNvPr>
+          <p:cNvSpPr txBox="1"/>
+          <p:nvPr/>
+        </p:nvSpPr>
+        <p:spPr>
+          <a:xfrm>
+            <a:off x="4967926" y="1843611"/>
+            <a:ext cx="1080745" cy="430887"/>
+          </a:xfrm>
+          <a:prstGeom prst="rect">
+            <a:avLst/>
+          </a:prstGeom>
+          <a:noFill/>
+        </p:spPr>
+        <p:txBody>
+          <a:bodyPr wrap="none" rtlCol="0">
+            <a:spAutoFit/>
+          </a:bodyPr>
+          <a:lstStyle/>
+          <a:p>
+            <a:r>
+              <a:rPr lang="ko-KR" altLang="en-US" sz="1100" dirty="0"/>
+              <a:t>클릭 시</a:t>
+            </a:r>
+            <a:endParaRPr lang="en-US" altLang="ko-KR" sz="1100" dirty="0"/>
+          </a:p>
+          <a:p>
+            <a:r>
+              <a:rPr lang="ko-KR" altLang="en-US" sz="1100" dirty="0" err="1"/>
+              <a:t>모달창</a:t>
+            </a:r>
+            <a:r>
+              <a:rPr lang="ko-KR" altLang="en-US" sz="1100" dirty="0"/>
+              <a:t> 띄우기</a:t>
+            </a:r>
+          </a:p>
+        </p:txBody>
+      </p:sp>
+      <p:cxnSp>
+        <p:nvCxnSpPr>
+          <p:cNvPr id="23" name="직선 화살표 연결선 22">
+            <a:extLst>
+              <a:ext uri="{FF2B5EF4-FFF2-40B4-BE49-F238E27FC236}">
+                <a16:creationId xmlns:a16="http://schemas.microsoft.com/office/drawing/2014/main" id="{1500D180-2C48-3961-F909-B249215EA1E1}"/>
+              </a:ext>
+            </a:extLst>
+          </p:cNvPr>
+          <p:cNvCxnSpPr>
+            <a:cxnSpLocks/>
+            <a:stCxn id="30" idx="2"/>
+          </p:cNvCxnSpPr>
+          <p:nvPr/>
+        </p:nvCxnSpPr>
+        <p:spPr>
+          <a:xfrm>
+            <a:off x="6192501" y="1275473"/>
+            <a:ext cx="190755" cy="1326325"/>
+          </a:xfrm>
+          <a:prstGeom prst="straightConnector1">
+            <a:avLst/>
+          </a:prstGeom>
+          <a:ln>
+            <a:tailEnd type="triangle"/>
+          </a:ln>
+        </p:spPr>
+        <p:style>
+          <a:lnRef idx="2">
+            <a:schemeClr val="accent5"/>
+          </a:lnRef>
+          <a:fillRef idx="0">
+            <a:schemeClr val="accent5"/>
+          </a:fillRef>
+          <a:effectRef idx="1">
+            <a:schemeClr val="accent5"/>
+          </a:effectRef>
+          <a:fontRef idx="minor">
+            <a:schemeClr val="tx1"/>
+          </a:fontRef>
+        </p:style>
+      </p:cxnSp>
+      <p:sp>
+        <p:nvSpPr>
+          <p:cNvPr id="24" name="TextBox 23">
+            <a:extLst>
+              <a:ext uri="{FF2B5EF4-FFF2-40B4-BE49-F238E27FC236}">
+                <a16:creationId xmlns:a16="http://schemas.microsoft.com/office/drawing/2014/main" id="{0E1A777D-513B-DF37-220E-91CD5A38B820}"/>
+              </a:ext>
+            </a:extLst>
+          </p:cNvPr>
+          <p:cNvSpPr txBox="1"/>
+          <p:nvPr/>
+        </p:nvSpPr>
+        <p:spPr>
+          <a:xfrm>
+            <a:off x="5960883" y="2649397"/>
+            <a:ext cx="1585690" cy="261610"/>
+          </a:xfrm>
+          <a:prstGeom prst="rect">
+            <a:avLst/>
+          </a:prstGeom>
+          <a:noFill/>
+        </p:spPr>
+        <p:txBody>
+          <a:bodyPr wrap="none" rtlCol="0">
+            <a:spAutoFit/>
+          </a:bodyPr>
+          <a:lstStyle/>
+          <a:p>
+            <a:r>
+              <a:rPr lang="ko-KR" altLang="en-US" sz="1100" dirty="0"/>
+              <a:t>클릭 시 </a:t>
+            </a:r>
+            <a:r>
+              <a:rPr lang="en-US" altLang="ko-KR" sz="1100" dirty="0"/>
+              <a:t>main</a:t>
+            </a:r>
+            <a:r>
+              <a:rPr lang="ko-KR" altLang="en-US" sz="1100" dirty="0"/>
+              <a:t>페이지로</a:t>
+            </a:r>
+          </a:p>
+        </p:txBody>
+      </p:sp>
+      <p:pic>
+        <p:nvPicPr>
+          <p:cNvPr id="27" name="그림 26" descr="텍스트, 스크린샷, 폰트, 소프트웨어이(가) 표시된 사진&#10;&#10;AI 생성 콘텐츠는 정확하지 않을 수 있습니다.">
+            <a:extLst>
+              <a:ext uri="{FF2B5EF4-FFF2-40B4-BE49-F238E27FC236}">
+                <a16:creationId xmlns:a16="http://schemas.microsoft.com/office/drawing/2014/main" id="{ABB1E63D-F38A-9820-04C4-E782C5670D2C}"/>
+              </a:ext>
+            </a:extLst>
+          </p:cNvPr>
+          <p:cNvPicPr>
+            <a:picLocks noChangeAspect="1"/>
+          </p:cNvPicPr>
+          <p:nvPr/>
+        </p:nvPicPr>
+        <p:blipFill>
+          <a:blip r:embed="rId5"/>
+          <a:stretch>
+            <a:fillRect/>
+          </a:stretch>
+        </p:blipFill>
+        <p:spPr>
+          <a:xfrm>
+            <a:off x="7308350" y="3923146"/>
+            <a:ext cx="3268524" cy="2692172"/>
+          </a:xfrm>
+          <a:prstGeom prst="rect">
+            <a:avLst/>
+          </a:prstGeom>
+        </p:spPr>
+      </p:pic>
+      <p:cxnSp>
+        <p:nvCxnSpPr>
+          <p:cNvPr id="29" name="직선 화살표 연결선 28">
+            <a:extLst>
+              <a:ext uri="{FF2B5EF4-FFF2-40B4-BE49-F238E27FC236}">
+                <a16:creationId xmlns:a16="http://schemas.microsoft.com/office/drawing/2014/main" id="{2D9ACBF1-F18B-751B-330B-1B6927CFE0C7}"/>
+              </a:ext>
+            </a:extLst>
+          </p:cNvPr>
+          <p:cNvCxnSpPr>
+            <a:cxnSpLocks/>
+            <a:stCxn id="33" idx="2"/>
+          </p:cNvCxnSpPr>
+          <p:nvPr/>
+        </p:nvCxnSpPr>
+        <p:spPr>
+          <a:xfrm flipH="1">
+            <a:off x="11048214" y="1207909"/>
+            <a:ext cx="622036" cy="1173945"/>
+          </a:xfrm>
+          <a:prstGeom prst="straightConnector1">
+            <a:avLst/>
+          </a:prstGeom>
+          <a:ln>
+            <a:tailEnd type="triangle"/>
+          </a:ln>
+        </p:spPr>
+        <p:style>
+          <a:lnRef idx="2">
+            <a:schemeClr val="accent5"/>
+          </a:lnRef>
+          <a:fillRef idx="0">
+            <a:schemeClr val="accent5"/>
+          </a:fillRef>
+          <a:effectRef idx="1">
+            <a:schemeClr val="accent5"/>
+          </a:effectRef>
+          <a:fontRef idx="minor">
+            <a:schemeClr val="tx1"/>
+          </a:fontRef>
+        </p:style>
+      </p:cxnSp>
+      <p:sp>
+        <p:nvSpPr>
+          <p:cNvPr id="30" name="직사각형 29">
+            <a:extLst>
+              <a:ext uri="{FF2B5EF4-FFF2-40B4-BE49-F238E27FC236}">
+                <a16:creationId xmlns:a16="http://schemas.microsoft.com/office/drawing/2014/main" id="{F92E311A-4402-1C01-FE3C-8B8120676DE7}"/>
+              </a:ext>
+            </a:extLst>
+          </p:cNvPr>
+          <p:cNvSpPr/>
+          <p:nvPr/>
+        </p:nvSpPr>
+        <p:spPr>
+          <a:xfrm>
+            <a:off x="6001746" y="948173"/>
+            <a:ext cx="381509" cy="327300"/>
+          </a:xfrm>
+          <a:prstGeom prst="rect">
+            <a:avLst/>
+          </a:prstGeom>
+          <a:noFill/>
+          <a:ln>
+            <a:solidFill>
+              <a:srgbClr val="FF0000"/>
+            </a:solidFill>
+          </a:ln>
+        </p:spPr>
+        <p:style>
+          <a:lnRef idx="2">
+            <a:schemeClr val="accent1">
+              <a:shade val="15000"/>
+            </a:schemeClr>
+          </a:lnRef>
+          <a:fillRef idx="1">
+            <a:schemeClr val="accent1"/>
+          </a:fillRef>
+          <a:effectRef idx="0">
+            <a:schemeClr val="accent1"/>
+          </a:effectRef>
+          <a:fontRef idx="minor">
+            <a:schemeClr val="lt1"/>
+          </a:fontRef>
+        </p:style>
+        <p:txBody>
+          <a:bodyPr rtlCol="0" anchor="ctr"/>
+          <a:lstStyle/>
+          <a:p>
+            <a:pPr algn="ctr"/>
+            <a:endParaRPr lang="ko-KR" altLang="en-US"/>
+          </a:p>
+        </p:txBody>
+      </p:sp>
+      <p:sp>
+        <p:nvSpPr>
+          <p:cNvPr id="33" name="직사각형 32">
+            <a:extLst>
+              <a:ext uri="{FF2B5EF4-FFF2-40B4-BE49-F238E27FC236}">
+                <a16:creationId xmlns:a16="http://schemas.microsoft.com/office/drawing/2014/main" id="{D8B9E456-C148-D958-8CAD-E43D3E4FE24C}"/>
+              </a:ext>
+            </a:extLst>
+          </p:cNvPr>
+          <p:cNvSpPr/>
+          <p:nvPr/>
+        </p:nvSpPr>
+        <p:spPr>
+          <a:xfrm>
+            <a:off x="11535560" y="970390"/>
+            <a:ext cx="269380" cy="237519"/>
+          </a:xfrm>
+          <a:prstGeom prst="rect">
+            <a:avLst/>
+          </a:prstGeom>
+          <a:noFill/>
+          <a:ln>
+            <a:solidFill>
+              <a:srgbClr val="FF0000"/>
+            </a:solidFill>
+          </a:ln>
+        </p:spPr>
+        <p:style>
+          <a:lnRef idx="2">
+            <a:schemeClr val="accent1">
+              <a:shade val="15000"/>
+            </a:schemeClr>
+          </a:lnRef>
+          <a:fillRef idx="1">
+            <a:schemeClr val="accent1"/>
+          </a:fillRef>
+          <a:effectRef idx="0">
+            <a:schemeClr val="accent1"/>
+          </a:effectRef>
+          <a:fontRef idx="minor">
+            <a:schemeClr val="lt1"/>
+          </a:fontRef>
+        </p:style>
+        <p:txBody>
+          <a:bodyPr rtlCol="0" anchor="ctr"/>
+          <a:lstStyle/>
+          <a:p>
+            <a:pPr algn="ctr"/>
+            <a:endParaRPr lang="ko-KR" altLang="en-US"/>
+          </a:p>
+        </p:txBody>
+      </p:sp>
+      <p:sp>
+        <p:nvSpPr>
+          <p:cNvPr id="36" name="TextBox 35">
+            <a:extLst>
+              <a:ext uri="{FF2B5EF4-FFF2-40B4-BE49-F238E27FC236}">
+                <a16:creationId xmlns:a16="http://schemas.microsoft.com/office/drawing/2014/main" id="{0BE77378-9EE6-C424-8F31-A2E41A9CDEC1}"/>
+              </a:ext>
+            </a:extLst>
+          </p:cNvPr>
+          <p:cNvSpPr txBox="1"/>
+          <p:nvPr/>
+        </p:nvSpPr>
+        <p:spPr>
+          <a:xfrm>
+            <a:off x="10405122" y="2411411"/>
+            <a:ext cx="1180131" cy="261610"/>
+          </a:xfrm>
+          <a:prstGeom prst="rect">
+            <a:avLst/>
+          </a:prstGeom>
+          <a:noFill/>
+        </p:spPr>
+        <p:txBody>
+          <a:bodyPr wrap="none" rtlCol="0">
+            <a:spAutoFit/>
+          </a:bodyPr>
+          <a:lstStyle/>
+          <a:p>
+            <a:r>
+              <a:rPr lang="ko-KR" altLang="en-US" sz="1100" dirty="0"/>
+              <a:t>클릭 시 창 닫힘</a:t>
+            </a:r>
+          </a:p>
+        </p:txBody>
+      </p:sp>
+      <p:sp>
+        <p:nvSpPr>
+          <p:cNvPr id="37" name="TextBox 36">
+            <a:extLst>
+              <a:ext uri="{FF2B5EF4-FFF2-40B4-BE49-F238E27FC236}">
+                <a16:creationId xmlns:a16="http://schemas.microsoft.com/office/drawing/2014/main" id="{A86861E4-7732-ECBF-D6BB-800E78D99800}"/>
+              </a:ext>
+            </a:extLst>
+          </p:cNvPr>
+          <p:cNvSpPr txBox="1"/>
+          <p:nvPr/>
+        </p:nvSpPr>
+        <p:spPr>
+          <a:xfrm>
+            <a:off x="6293329" y="3923146"/>
+            <a:ext cx="1015021" cy="276999"/>
+          </a:xfrm>
+          <a:prstGeom prst="rect">
+            <a:avLst/>
+          </a:prstGeom>
+          <a:noFill/>
+        </p:spPr>
+        <p:txBody>
+          <a:bodyPr wrap="none" rtlCol="0">
+            <a:spAutoFit/>
+          </a:bodyPr>
+          <a:lstStyle/>
+          <a:p>
+            <a:r>
+              <a:rPr lang="ko-KR" altLang="en-US" sz="1200">
+                <a:highlight>
+                  <a:srgbClr val="FFFF00"/>
+                </a:highlight>
+              </a:rPr>
+              <a:t>모달</a:t>
+            </a:r>
+            <a:r>
+              <a:rPr lang="ko-KR" altLang="en-US" sz="1200" dirty="0">
+                <a:highlight>
+                  <a:srgbClr val="FFFF00"/>
+                </a:highlight>
+              </a:rPr>
+              <a:t> </a:t>
+            </a:r>
+            <a:r>
+              <a:rPr lang="en-US" altLang="ko-KR" sz="1200" dirty="0" err="1">
+                <a:highlight>
+                  <a:srgbClr val="FFFF00"/>
+                </a:highlight>
+              </a:rPr>
+              <a:t>js</a:t>
+            </a:r>
+            <a:r>
+              <a:rPr lang="en-US" altLang="ko-KR" sz="1200" dirty="0">
+                <a:highlight>
+                  <a:srgbClr val="FFFF00"/>
+                </a:highlight>
+              </a:rPr>
+              <a:t> </a:t>
+            </a:r>
+            <a:r>
+              <a:rPr lang="ko-KR" altLang="en-US" sz="1200" dirty="0">
+                <a:highlight>
+                  <a:srgbClr val="FFFF00"/>
+                </a:highlight>
+              </a:rPr>
+              <a:t>코드</a:t>
+            </a:r>
+          </a:p>
+        </p:txBody>
+      </p:sp>
     </p:spTree>
     <p:extLst>
       <p:ext uri="{BB962C8B-B14F-4D97-AF65-F5344CB8AC3E}">
